--- a/dist/초1/체육·보건·안전/움직임/초1_체육·보건·안전_움직임_01_걷기·달리기·균형놀이.pptx
+++ b/dist/초1/체육·보건·안전/움직임/초1_체육·보건·안전_움직임_01_걷기·달리기·균형놀이.pptx
@@ -114,34 +114,34 @@
   <p:extLst>
     <p:ext uri="{521415D9-36F7-43E2-AB2F-B90AF26B5E84}">
       <p14:sectionLst xmlns:p14="http://schemas.microsoft.com/office/powerpoint/2010/main">
-        <p14:section name="도입" id="{67447ec1-ea62-2e9e-d885-cfde4a9706cf}">
+        <p14:section name="도입" id="{d954288a-3063-9c5c-fc3a-2fecfc89055d}">
           <p14:sldIdLst>
             <p14:sldId id="256"/>
             <p14:sldId id="257"/>
           </p14:sldIdLst>
         </p14:section>
-        <p14:section name="개념" id="{add0a835-64df-74f8-296c-b834698a3020}">
+        <p14:section name="개념" id="{a1fd34e0-b36c-f965-d680-85b036859775}">
           <p14:sldIdLst>
             <p14:sldId id="258"/>
           </p14:sldIdLst>
         </p14:section>
-        <p14:section name="연습" id="{741d3823-bc01-6f84-4a83-9dfdb8ca970a}">
+        <p14:section name="연습" id="{0318e061-a099-f526-004e-6d0807a18e39}">
           <p14:sldIdLst>
             <p14:sldId id="259"/>
             <p14:sldId id="260"/>
           </p14:sldIdLst>
         </p14:section>
-        <p14:section name="확인" id="{e460198c-06cc-f765-c628-47d4864c5c26}">
+        <p14:section name="확인" id="{73194ffc-cafc-8f6a-44f0-37449aeb3f74}">
           <p14:sldIdLst>
             <p14:sldId id="261"/>
           </p14:sldIdLst>
         </p14:section>
-        <p14:section name="정리" id="{b0140529-20cd-8e28-32c1-4c0f4ea382ef}">
+        <p14:section name="정리" id="{89991246-3eb6-2302-1141-d1b8907f43d5}">
           <p14:sldIdLst>
             <p14:sldId id="262"/>
           </p14:sldIdLst>
         </p14:section>
-        <p14:section name="보충" id="{2dc228c5-57e9-66b6-5e47-4f005af95042}">
+        <p14:section name="보충" id="{5b804a2c-738d-06c2-3c7a-c56bca1b4f51}">
           <p14:sldIdLst>
             <p14:sldId id="263"/>
           </p14:sldIdLst>

--- a/dist/초1/체육·보건·안전/움직임/초1_체육·보건·안전_움직임_01_걷기·달리기·균형놀이.pptx
+++ b/dist/초1/체육·보건·안전/움직임/초1_체육·보건·안전_움직임_01_걷기·달리기·균형놀이.pptx
@@ -114,34 +114,34 @@
   <p:extLst>
     <p:ext uri="{521415D9-36F7-43E2-AB2F-B90AF26B5E84}">
       <p14:sectionLst xmlns:p14="http://schemas.microsoft.com/office/powerpoint/2010/main">
-        <p14:section name="도입" id="{d954288a-3063-9c5c-fc3a-2fecfc89055d}">
+        <p14:section name="도입" id="{57648a73-c1c5-58f7-7866-bb39bfe56b20}">
           <p14:sldIdLst>
             <p14:sldId id="256"/>
             <p14:sldId id="257"/>
           </p14:sldIdLst>
         </p14:section>
-        <p14:section name="개념" id="{a1fd34e0-b36c-f965-d680-85b036859775}">
+        <p14:section name="개념" id="{7173de53-388e-0eee-7522-6273a7db57b6}">
           <p14:sldIdLst>
             <p14:sldId id="258"/>
           </p14:sldIdLst>
         </p14:section>
-        <p14:section name="연습" id="{0318e061-a099-f526-004e-6d0807a18e39}">
+        <p14:section name="연습" id="{beedb402-27da-852a-ed67-c54ef1e8618b}">
           <p14:sldIdLst>
             <p14:sldId id="259"/>
             <p14:sldId id="260"/>
           </p14:sldIdLst>
         </p14:section>
-        <p14:section name="확인" id="{73194ffc-cafc-8f6a-44f0-37449aeb3f74}">
+        <p14:section name="확인" id="{0acf0e6e-f6c5-aa3c-bea0-821b970ea60b}">
           <p14:sldIdLst>
             <p14:sldId id="261"/>
           </p14:sldIdLst>
         </p14:section>
-        <p14:section name="정리" id="{89991246-3eb6-2302-1141-d1b8907f43d5}">
+        <p14:section name="정리" id="{0f7eb79c-1ef8-f374-17b8-611686c8f5b4}">
           <p14:sldIdLst>
             <p14:sldId id="262"/>
           </p14:sldIdLst>
         </p14:section>
-        <p14:section name="보충" id="{5b804a2c-738d-06c2-3c7a-c56bca1b4f51}">
+        <p14:section name="보충" id="{3f072f42-c71d-610a-0bc5-5e76751e8482}">
           <p14:sldIdLst>
             <p14:sldId id="263"/>
           </p14:sldIdLst>
